--- a/Paperwork/COMP3000_Poster_Print.pptx
+++ b/Paperwork/COMP3000_Poster_Print.pptx
@@ -104,6 +104,11 @@
       </a:defRPr>
     </a:lvl9pPr>
   </p:defaultTextStyle>
+  <p:extLst>
+    <p:ext uri="{EFAFB233-063F-42B5-8137-9DF3F51BA10A}">
+      <p15:sldGuideLst xmlns:p15="http://schemas.microsoft.com/office/powerpoint/2012/main"/>
+    </p:ext>
+  </p:extLst>
 </p:presentation>
 </file>
 
@@ -238,7 +243,7 @@
           <a:p>
             <a:fld id="{A2F05DA8-2842-4FC0-8272-16BCB16B9E87}" type="datetimeFigureOut">
               <a:rPr lang="en-GB" smtClean="0"/>
-              <a:t>20/04/2026</a:t>
+              <a:t>21/04/2026</a:t>
             </a:fld>
             <a:endParaRPr lang="en-GB"/>
           </a:p>
@@ -408,7 +413,7 @@
           <a:p>
             <a:fld id="{A2F05DA8-2842-4FC0-8272-16BCB16B9E87}" type="datetimeFigureOut">
               <a:rPr lang="en-GB" smtClean="0"/>
-              <a:t>20/04/2026</a:t>
+              <a:t>21/04/2026</a:t>
             </a:fld>
             <a:endParaRPr lang="en-GB"/>
           </a:p>
@@ -588,7 +593,7 @@
           <a:p>
             <a:fld id="{A2F05DA8-2842-4FC0-8272-16BCB16B9E87}" type="datetimeFigureOut">
               <a:rPr lang="en-GB" smtClean="0"/>
-              <a:t>20/04/2026</a:t>
+              <a:t>21/04/2026</a:t>
             </a:fld>
             <a:endParaRPr lang="en-GB"/>
           </a:p>
@@ -758,7 +763,7 @@
           <a:p>
             <a:fld id="{A2F05DA8-2842-4FC0-8272-16BCB16B9E87}" type="datetimeFigureOut">
               <a:rPr lang="en-GB" smtClean="0"/>
-              <a:t>20/04/2026</a:t>
+              <a:t>21/04/2026</a:t>
             </a:fld>
             <a:endParaRPr lang="en-GB"/>
           </a:p>
@@ -1004,7 +1009,7 @@
           <a:p>
             <a:fld id="{A2F05DA8-2842-4FC0-8272-16BCB16B9E87}" type="datetimeFigureOut">
               <a:rPr lang="en-GB" smtClean="0"/>
-              <a:t>20/04/2026</a:t>
+              <a:t>21/04/2026</a:t>
             </a:fld>
             <a:endParaRPr lang="en-GB"/>
           </a:p>
@@ -1236,7 +1241,7 @@
           <a:p>
             <a:fld id="{A2F05DA8-2842-4FC0-8272-16BCB16B9E87}" type="datetimeFigureOut">
               <a:rPr lang="en-GB" smtClean="0"/>
-              <a:t>20/04/2026</a:t>
+              <a:t>21/04/2026</a:t>
             </a:fld>
             <a:endParaRPr lang="en-GB"/>
           </a:p>
@@ -1603,7 +1608,7 @@
           <a:p>
             <a:fld id="{A2F05DA8-2842-4FC0-8272-16BCB16B9E87}" type="datetimeFigureOut">
               <a:rPr lang="en-GB" smtClean="0"/>
-              <a:t>20/04/2026</a:t>
+              <a:t>21/04/2026</a:t>
             </a:fld>
             <a:endParaRPr lang="en-GB"/>
           </a:p>
@@ -1721,7 +1726,7 @@
           <a:p>
             <a:fld id="{A2F05DA8-2842-4FC0-8272-16BCB16B9E87}" type="datetimeFigureOut">
               <a:rPr lang="en-GB" smtClean="0"/>
-              <a:t>20/04/2026</a:t>
+              <a:t>21/04/2026</a:t>
             </a:fld>
             <a:endParaRPr lang="en-GB"/>
           </a:p>
@@ -1816,7 +1821,7 @@
           <a:p>
             <a:fld id="{A2F05DA8-2842-4FC0-8272-16BCB16B9E87}" type="datetimeFigureOut">
               <a:rPr lang="en-GB" smtClean="0"/>
-              <a:t>20/04/2026</a:t>
+              <a:t>21/04/2026</a:t>
             </a:fld>
             <a:endParaRPr lang="en-GB"/>
           </a:p>
@@ -2093,7 +2098,7 @@
           <a:p>
             <a:fld id="{A2F05DA8-2842-4FC0-8272-16BCB16B9E87}" type="datetimeFigureOut">
               <a:rPr lang="en-GB" smtClean="0"/>
-              <a:t>20/04/2026</a:t>
+              <a:t>21/04/2026</a:t>
             </a:fld>
             <a:endParaRPr lang="en-GB"/>
           </a:p>
@@ -2350,7 +2355,7 @@
           <a:p>
             <a:fld id="{A2F05DA8-2842-4FC0-8272-16BCB16B9E87}" type="datetimeFigureOut">
               <a:rPr lang="en-GB" smtClean="0"/>
-              <a:t>20/04/2026</a:t>
+              <a:t>21/04/2026</a:t>
             </a:fld>
             <a:endParaRPr lang="en-GB"/>
           </a:p>
@@ -2563,7 +2568,7 @@
           <a:p>
             <a:fld id="{A2F05DA8-2842-4FC0-8272-16BCB16B9E87}" type="datetimeFigureOut">
               <a:rPr lang="en-GB" smtClean="0"/>
-              <a:t>20/04/2026</a:t>
+              <a:t>21/04/2026</a:t>
             </a:fld>
             <a:endParaRPr lang="en-GB"/>
           </a:p>
@@ -4472,10 +4477,10 @@
                   </a:schemeClr>
                 </a:solidFill>
               </a:rPr>
-              <a:t>Oliver Cole	</a:t>
-            </a:r>
-            <a:r>
-              <a:rPr lang="en-GB" sz="7200" dirty="0">
+              <a:t>Oliver Cole – 10859527 – </a:t>
+            </a:r>
+            <a:r>
+              <a:rPr lang="en-GB" sz="5400" dirty="0">
                 <a:solidFill>
                   <a:schemeClr val="bg2">
                     <a:lumMod val="90000"/>
@@ -4492,7 +4497,7 @@
               <a:t>oliver.cole@students.plymouth.ac.uk</a:t>
             </a:r>
             <a:r>
-              <a:rPr lang="en-GB" sz="7200" dirty="0">
+              <a:rPr lang="en-GB" sz="5400" dirty="0">
                 <a:solidFill>
                   <a:schemeClr val="bg2">
                     <a:lumMod val="90000"/>
@@ -4501,6 +4506,13 @@
               </a:rPr>
               <a:t> </a:t>
             </a:r>
+            <a:endParaRPr lang="en-GB" sz="7200" dirty="0">
+              <a:solidFill>
+                <a:schemeClr val="bg2">
+                  <a:lumMod val="90000"/>
+                </a:schemeClr>
+              </a:solidFill>
+            </a:endParaRPr>
           </a:p>
           <a:p>
             <a:r>
@@ -4637,7 +4649,7 @@
         </p:blipFill>
         <p:spPr>
           <a:xfrm>
-            <a:off x="36155083" y="27540076"/>
+            <a:off x="33010977" y="27606332"/>
             <a:ext cx="6752535" cy="2729805"/>
           </a:xfrm>
           <a:prstGeom prst="rect">
@@ -5170,6 +5182,42 @@
           <a:xfrm>
             <a:off x="10163203" y="3782695"/>
             <a:ext cx="21405752" cy="12058523"/>
+          </a:xfrm>
+          <a:prstGeom prst="rect">
+            <a:avLst/>
+          </a:prstGeom>
+        </p:spPr>
+      </p:pic>
+      <p:pic>
+        <p:nvPicPr>
+          <p:cNvPr id="10" name="Picture 9">
+            <a:extLst>
+              <a:ext uri="{FF2B5EF4-FFF2-40B4-BE49-F238E27FC236}">
+                <a16:creationId xmlns:a16="http://schemas.microsoft.com/office/drawing/2014/main" id="{2E75443D-B2D5-E4DF-DC91-BAE32CCA31B4}"/>
+              </a:ext>
+            </a:extLst>
+          </p:cNvPr>
+          <p:cNvPicPr>
+            <a:picLocks noChangeAspect="1"/>
+          </p:cNvPicPr>
+          <p:nvPr/>
+        </p:nvPicPr>
+        <p:blipFill>
+          <a:blip r:embed="rId12">
+            <a:extLst>
+              <a:ext uri="{28A0092B-C50C-407E-A947-70E740481C1C}">
+                <a14:useLocalDpi xmlns:a14="http://schemas.microsoft.com/office/drawing/2010/main" val="0"/>
+              </a:ext>
+            </a:extLst>
+          </a:blip>
+          <a:stretch>
+            <a:fillRect/>
+          </a:stretch>
+        </p:blipFill>
+        <p:spPr>
+          <a:xfrm>
+            <a:off x="40096905" y="27802837"/>
+            <a:ext cx="2173302" cy="2128949"/>
           </a:xfrm>
           <a:prstGeom prst="rect">
             <a:avLst/>
